--- a/2024/NLRN/poster.pptx
+++ b/2024/NLRN/poster.pptx
@@ -126,90 +126,27 @@
 </p:presentation>
 </file>
 
-<file path=ppt/revisionInfo.xml><?xml version="1.0" encoding="utf-8"?>
-<p1510:revInfo xmlns:a="http://schemas.openxmlformats.org/drawingml/2006/main" xmlns:r="http://schemas.openxmlformats.org/officeDocument/2006/relationships" xmlns:p1510="http://schemas.microsoft.com/office/powerpoint/2015/10/main">
-  <p1510:revLst>
-    <p1510:client id="{C930FB71-4C98-3D43-AF34-BDAA20CE95DD}" v="1" dt="2025-07-17T12:25:48.214"/>
-  </p1510:revLst>
-</p1510:revInfo>
-</file>
-
 <file path=ppt/changesInfos/changesInfo1.xml><?xml version="1.0" encoding="utf-8"?>
 <pc:chgInfo xmlns:a="http://schemas.openxmlformats.org/drawingml/2006/main" xmlns:r="http://schemas.openxmlformats.org/officeDocument/2006/relationships" xmlns:ac="http://schemas.microsoft.com/office/drawing/2013/main/command" xmlns:pc="http://schemas.microsoft.com/office/powerpoint/2013/main/command">
   <pc:docChgLst>
-    <pc:chgData name="Oberman, H.I. (Hanne)" userId="e27d1978-6ace-4e0e-9109-4f58c8b6a455" providerId="ADAL" clId="{C930FB71-4C98-3D43-AF34-BDAA20CE95DD}"/>
-    <pc:docChg chg="custSel addSld delSld modSld">
-      <pc:chgData name="Oberman, H.I. (Hanne)" userId="e27d1978-6ace-4e0e-9109-4f58c8b6a455" providerId="ADAL" clId="{C930FB71-4C98-3D43-AF34-BDAA20CE95DD}" dt="2025-07-17T12:26:45.765" v="11" actId="2696"/>
+    <pc:chgData name="Oberman, H.I. (Hanne)" userId="e27d1978-6ace-4e0e-9109-4f58c8b6a455" providerId="ADAL" clId="{3A5FB9CE-2F3F-5B40-87DE-01CF2017EA9C}"/>
+    <pc:docChg chg="modSld">
+      <pc:chgData name="Oberman, H.I. (Hanne)" userId="e27d1978-6ace-4e0e-9109-4f58c8b6a455" providerId="ADAL" clId="{3A5FB9CE-2F3F-5B40-87DE-01CF2017EA9C}" dt="2026-08-31T20:49:43.303" v="5" actId="1076"/>
       <pc:docMkLst>
         <pc:docMk/>
       </pc:docMkLst>
-      <pc:sldChg chg="delSp modSp mod">
-        <pc:chgData name="Oberman, H.I. (Hanne)" userId="e27d1978-6ace-4e0e-9109-4f58c8b6a455" providerId="ADAL" clId="{C930FB71-4C98-3D43-AF34-BDAA20CE95DD}" dt="2025-07-17T12:09:28.201" v="7" actId="478"/>
+      <pc:sldChg chg="addSp modSp mod">
+        <pc:chgData name="Oberman, H.I. (Hanne)" userId="e27d1978-6ace-4e0e-9109-4f58c8b6a455" providerId="ADAL" clId="{3A5FB9CE-2F3F-5B40-87DE-01CF2017EA9C}" dt="2026-08-31T20:49:43.303" v="5" actId="1076"/>
         <pc:sldMkLst>
           <pc:docMk/>
           <pc:sldMk cId="1435791218" sldId="256"/>
         </pc:sldMkLst>
-        <pc:spChg chg="del mod">
-          <ac:chgData name="Oberman, H.I. (Hanne)" userId="e27d1978-6ace-4e0e-9109-4f58c8b6a455" providerId="ADAL" clId="{C930FB71-4C98-3D43-AF34-BDAA20CE95DD}" dt="2025-07-17T12:09:28.201" v="7" actId="478"/>
-          <ac:spMkLst>
-            <pc:docMk/>
-            <pc:sldMk cId="1435791218" sldId="256"/>
-            <ac:spMk id="2" creationId="{73BBCC02-B3E2-2EFA-28FC-2A8B923CE08D}"/>
-          </ac:spMkLst>
-        </pc:spChg>
-        <pc:picChg chg="mod modCrop">
-          <ac:chgData name="Oberman, H.I. (Hanne)" userId="e27d1978-6ace-4e0e-9109-4f58c8b6a455" providerId="ADAL" clId="{C930FB71-4C98-3D43-AF34-BDAA20CE95DD}" dt="2025-07-17T12:08:09.024" v="5" actId="732"/>
+        <pc:picChg chg="add mod">
+          <ac:chgData name="Oberman, H.I. (Hanne)" userId="e27d1978-6ace-4e0e-9109-4f58c8b6a455" providerId="ADAL" clId="{3A5FB9CE-2F3F-5B40-87DE-01CF2017EA9C}" dt="2026-08-31T20:49:43.303" v="5" actId="1076"/>
           <ac:picMkLst>
             <pc:docMk/>
             <pc:sldMk cId="1435791218" sldId="256"/>
-            <ac:picMk id="30" creationId="{68D73627-779A-FB31-08F5-8CB2D76D09ED}"/>
-          </ac:picMkLst>
-        </pc:picChg>
-      </pc:sldChg>
-      <pc:sldChg chg="addSp modSp new del mod">
-        <pc:chgData name="Oberman, H.I. (Hanne)" userId="e27d1978-6ace-4e0e-9109-4f58c8b6a455" providerId="ADAL" clId="{C930FB71-4C98-3D43-AF34-BDAA20CE95DD}" dt="2025-07-17T12:26:45.765" v="11" actId="2696"/>
-        <pc:sldMkLst>
-          <pc:docMk/>
-          <pc:sldMk cId="2479449240" sldId="257"/>
-        </pc:sldMkLst>
-        <pc:picChg chg="add mod">
-          <ac:chgData name="Oberman, H.I. (Hanne)" userId="e27d1978-6ace-4e0e-9109-4f58c8b6a455" providerId="ADAL" clId="{C930FB71-4C98-3D43-AF34-BDAA20CE95DD}" dt="2025-07-17T12:25:51.762" v="10" actId="1076"/>
-          <ac:picMkLst>
-            <pc:docMk/>
-            <pc:sldMk cId="2479449240" sldId="257"/>
-            <ac:picMk id="2" creationId="{A8BAE1C4-F3EE-0D82-AE84-ABF566356D9C}"/>
-          </ac:picMkLst>
-        </pc:picChg>
-        <pc:picChg chg="add mod">
-          <ac:chgData name="Oberman, H.I. (Hanne)" userId="e27d1978-6ace-4e0e-9109-4f58c8b6a455" providerId="ADAL" clId="{C930FB71-4C98-3D43-AF34-BDAA20CE95DD}" dt="2025-07-17T12:25:51.762" v="10" actId="1076"/>
-          <ac:picMkLst>
-            <pc:docMk/>
-            <pc:sldMk cId="2479449240" sldId="257"/>
-            <ac:picMk id="3" creationId="{AA8F5A4F-DB2D-160B-1934-C398929FD144}"/>
-          </ac:picMkLst>
-        </pc:picChg>
-        <pc:picChg chg="add mod">
-          <ac:chgData name="Oberman, H.I. (Hanne)" userId="e27d1978-6ace-4e0e-9109-4f58c8b6a455" providerId="ADAL" clId="{C930FB71-4C98-3D43-AF34-BDAA20CE95DD}" dt="2025-07-17T12:25:51.762" v="10" actId="1076"/>
-          <ac:picMkLst>
-            <pc:docMk/>
-            <pc:sldMk cId="2479449240" sldId="257"/>
-            <ac:picMk id="4" creationId="{F03D5B98-4DF7-59A3-40C0-5AB92C27A5DC}"/>
-          </ac:picMkLst>
-        </pc:picChg>
-        <pc:picChg chg="add mod">
-          <ac:chgData name="Oberman, H.I. (Hanne)" userId="e27d1978-6ace-4e0e-9109-4f58c8b6a455" providerId="ADAL" clId="{C930FB71-4C98-3D43-AF34-BDAA20CE95DD}" dt="2025-07-17T12:25:51.762" v="10" actId="1076"/>
-          <ac:picMkLst>
-            <pc:docMk/>
-            <pc:sldMk cId="2479449240" sldId="257"/>
-            <ac:picMk id="5" creationId="{354F337C-37FC-7A38-373D-19C0AB299359}"/>
-          </ac:picMkLst>
-        </pc:picChg>
-        <pc:picChg chg="add mod">
-          <ac:chgData name="Oberman, H.I. (Hanne)" userId="e27d1978-6ace-4e0e-9109-4f58c8b6a455" providerId="ADAL" clId="{C930FB71-4C98-3D43-AF34-BDAA20CE95DD}" dt="2025-07-17T12:25:51.762" v="10" actId="1076"/>
-          <ac:picMkLst>
-            <pc:docMk/>
-            <pc:sldMk cId="2479449240" sldId="257"/>
-            <ac:picMk id="6" creationId="{617CFA17-F6DB-83E1-2FE6-69BC5406FF11}"/>
+            <ac:picMk id="5" creationId="{1C4FC98D-0F79-AB70-0F47-5961DD959839}"/>
           </ac:picMkLst>
         </pc:picChg>
       </pc:sldChg>
@@ -300,7 +237,7 @@
           <a:p>
             <a:fld id="{ADC829B4-9606-2A42-8BE7-C95716C4B49D}" type="datetimeFigureOut">
               <a:rPr lang="nl-NL" smtClean="0"/>
-              <a:t>16-07-2025</a:t>
+              <a:t>31-08-2026</a:t>
             </a:fld>
             <a:endParaRPr lang="nl-NL"/>
           </a:p>
@@ -706,7 +643,7 @@
           <a:p>
             <a:fld id="{C28BEF97-4A46-C940-8C59-2C42CB4C4E51}" type="datetimeFigureOut">
               <a:rPr lang="nl-NL" smtClean="0"/>
-              <a:t>16-07-2025</a:t>
+              <a:t>31-08-2026</a:t>
             </a:fld>
             <a:endParaRPr lang="nl-NL"/>
           </a:p>
@@ -5471,6 +5408,36 @@
           <a:xfrm>
             <a:off x="30987363" y="20483503"/>
             <a:ext cx="1106814" cy="1196743"/>
+          </a:xfrm>
+          <a:prstGeom prst="rect">
+            <a:avLst/>
+          </a:prstGeom>
+        </p:spPr>
+      </p:pic>
+      <p:pic>
+        <p:nvPicPr>
+          <p:cNvPr id="5" name="Picture 4">
+            <a:extLst>
+              <a:ext uri="{FF2B5EF4-FFF2-40B4-BE49-F238E27FC236}">
+                <a16:creationId xmlns:a16="http://schemas.microsoft.com/office/drawing/2014/main" id="{1C4FC98D-0F79-AB70-0F47-5961DD959839}"/>
+              </a:ext>
+            </a:extLst>
+          </p:cNvPr>
+          <p:cNvPicPr>
+            <a:picLocks noChangeAspect="1"/>
+          </p:cNvPicPr>
+          <p:nvPr/>
+        </p:nvPicPr>
+        <p:blipFill>
+          <a:blip r:embed="rId22"/>
+          <a:stretch>
+            <a:fillRect/>
+          </a:stretch>
+        </p:blipFill>
+        <p:spPr>
+          <a:xfrm>
+            <a:off x="12690522" y="15643523"/>
+            <a:ext cx="1720223" cy="1978257"/>
           </a:xfrm>
           <a:prstGeom prst="rect">
             <a:avLst/>
